--- a/budget-transfer/process/06-process-definition.pptx
+++ b/budget-transfer/process/06-process-definition.pptx
@@ -3213,7 +3213,7 @@
                 <a:ea typeface="Yu Gothic"/>
                 <a:cs typeface="Yu Gothic"/>
               </a:rPr>
-              <a:t>文書番号 BTR-P-06　｜　版 1.4　｜　所管 予算移管事務局　｜　承認者 IT部門長　｜　最終改訂日 2026-10-11</a:t>
+              <a:t>文書番号 BTR-P-06　｜　版 1.5　｜　所管 予算移管事務局　｜　承認者 IT部門長　｜　最終改訂日 2026-10-12</a:t>
             </a:r>
           </a:p>
         </p:txBody>
@@ -18853,7 +18853,7 @@
                           <a:ea typeface="Yu Gothic"/>
                           <a:cs typeface="Yu Gothic"/>
                         </a:rPr>
-                        <a:t>1.2</a:t>
+                        <a:t>1.5</a:t>
                       </a:r>
                     </a:p>
                   </a:txBody>
@@ -19123,7 +19123,7 @@
                           <a:ea typeface="Yu Gothic"/>
                           <a:cs typeface="Yu Gothic"/>
                         </a:rPr>
-                        <a:t>2026-10-11</a:t>
+                        <a:t>2026-10-12</a:t>
                       </a:r>
                     </a:p>
                   </a:txBody>
@@ -24518,7 +24518,7 @@
                 <a:ea typeface="Yu Gothic"/>
                 <a:cs typeface="Yu Gothic"/>
               </a:rPr>
-              <a:t>丸数字はプロセス一覧の No.、§ は担当の Runbook の節を示す。＋のひし形は並列ゲートウェイ（⑩⑪と⑫を同時に進め、両方が終わったら12月末のゴールに達する。⑨・⑬は欠番）。</a:t>
+              <a:t>丸数字はプロセス一覧の No.、§ は担当の Runbook の節を示す。＋のひし形は並列ゲートウェイ（⑩⑪と⑫を同時に進め、両方が終わったら12月末のゴールに達する。⑨・⑬・⑭は欠番）。</a:t>
             </a:r>
           </a:p>
           <a:p>

--- a/budget-transfer/process/06-process-definition.pptx
+++ b/budget-transfer/process/06-process-definition.pptx
@@ -3213,7 +3213,7 @@
                 <a:ea typeface="Yu Gothic"/>
                 <a:cs typeface="Yu Gothic"/>
               </a:rPr>
-              <a:t>文書番号 BTR-P-06　｜　版 1.5　｜　所管 予算移管事務局　｜　承認者 IT部門長　｜　最終改訂日 2026-10-12</a:t>
+              <a:t>文書番号 BTR-P-06　｜　版 1.6　｜　所管 予算移管事務局　｜　承認者 IT部門長　｜　最終改訂日 2026-10-17</a:t>
             </a:r>
           </a:p>
         </p:txBody>
@@ -4191,7 +4191,7 @@
                           <a:ea typeface="Yu Gothic"/>
                           <a:cs typeface="Yu Gothic"/>
                         </a:rPr>
-                        <a:t>案件担当</a:t>
+                        <a:t>窓口担当</a:t>
                       </a:r>
                     </a:p>
                   </a:txBody>
@@ -4235,7 +4235,7 @@
                           <a:ea typeface="Yu Gothic"/>
                           <a:cs typeface="Yu Gothic"/>
                         </a:rPr>
-                        <a:t>準備完了の確認の期限（12/18）まで</a:t>
+                        <a:t>準備完了の確認の目安（12/18）まで</a:t>
                       </a:r>
                     </a:p>
                   </a:txBody>
@@ -4279,7 +4279,7 @@
                           <a:ea typeface="Yu Gothic"/>
                           <a:cs typeface="Yu Gothic"/>
                         </a:rPr>
-                        <a:t>案件担当編 §3.7</a:t>
+                        <a:t>窓口担当編 §3.7</a:t>
                       </a:r>
                     </a:p>
                   </a:txBody>
@@ -4501,7 +4501,7 @@
                           <a:ea typeface="Yu Gothic"/>
                           <a:cs typeface="Yu Gothic"/>
                         </a:rPr>
-                        <a:t>案件担当</a:t>
+                        <a:t>窓口担当</a:t>
                       </a:r>
                     </a:p>
                   </a:txBody>
@@ -4545,7 +4545,7 @@
                           <a:ea typeface="Yu Gothic"/>
                           <a:cs typeface="Yu Gothic"/>
                         </a:rPr>
-                        <a:t>準備完了の確認の期限（12/18）まで</a:t>
+                        <a:t>準備完了の確認の目安（12/18）まで</a:t>
                       </a:r>
                     </a:p>
                   </a:txBody>
@@ -4589,7 +4589,7 @@
                           <a:ea typeface="Yu Gothic"/>
                           <a:cs typeface="Yu Gothic"/>
                         </a:rPr>
-                        <a:t>案件担当編 §3.8</a:t>
+                        <a:t>窓口担当編 §3.8</a:t>
                       </a:r>
                     </a:p>
                   </a:txBody>
@@ -4811,7 +4811,7 @@
                           <a:ea typeface="Yu Gothic"/>
                           <a:cs typeface="Yu Gothic"/>
                         </a:rPr>
-                        <a:t>進行役</a:t>
+                        <a:t>事務局</a:t>
                       </a:r>
                     </a:p>
                   </a:txBody>
@@ -4899,7 +4899,7 @@
                           <a:ea typeface="Yu Gothic"/>
                           <a:cs typeface="Yu Gothic"/>
                         </a:rPr>
-                        <a:t>進行役編 §3.4</a:t>
+                        <a:t>事務局編 §3.4</a:t>
                       </a:r>
                     </a:p>
                   </a:txBody>
@@ -5741,7 +5741,7 @@
                           <a:ea typeface="Yu Gothic"/>
                           <a:cs typeface="Yu Gothic"/>
                         </a:rPr>
-                        <a:t>進行役</a:t>
+                        <a:t>事務局</a:t>
                       </a:r>
                     </a:p>
                   </a:txBody>
@@ -5829,7 +5829,7 @@
                           <a:ea typeface="Yu Gothic"/>
                           <a:cs typeface="Yu Gothic"/>
                         </a:rPr>
-                        <a:t>進行役編 §3.6</a:t>
+                        <a:t>事務局編 §3.6</a:t>
                       </a:r>
                     </a:p>
                   </a:txBody>
@@ -6051,7 +6051,7 @@
                           <a:ea typeface="Yu Gothic"/>
                           <a:cs typeface="Yu Gothic"/>
                         </a:rPr>
-                        <a:t>進行役</a:t>
+                        <a:t>事務局</a:t>
                       </a:r>
                     </a:p>
                   </a:txBody>
@@ -6139,7 +6139,7 @@
                           <a:ea typeface="Yu Gothic"/>
                           <a:cs typeface="Yu Gothic"/>
                         </a:rPr>
-                        <a:t>進行役編 §3.7</a:t>
+                        <a:t>事務局編 §3.7</a:t>
                       </a:r>
                     </a:p>
                   </a:txBody>
@@ -6394,7 +6394,7 @@
                           <a:ea typeface="Yu Gothic"/>
                           <a:cs typeface="Yu Gothic"/>
                         </a:rPr>
-                        <a:t>進行役</a:t>
+                        <a:t>事務局</a:t>
                       </a:r>
                     </a:p>
                   </a:txBody>
@@ -6438,7 +6438,7 @@
                           <a:ea typeface="Yu Gothic"/>
                           <a:cs typeface="Yu Gothic"/>
                         </a:rPr>
-                        <a:t>案件担当</a:t>
+                        <a:t>窓口担当</a:t>
                       </a:r>
                     </a:p>
                   </a:txBody>
@@ -6616,7 +6616,7 @@
                           <a:ea typeface="Yu Gothic"/>
                           <a:cs typeface="Yu Gothic"/>
                         </a:rPr>
-                        <a:t>① キックオフを開催する（IT部門内）</a:t>
+                        <a:t>① ガイドラインを公開し、説明する</a:t>
                       </a:r>
                     </a:p>
                   </a:txBody>
@@ -6882,7 +6882,7 @@
                           <a:ea typeface="Yu Gothic"/>
                           <a:cs typeface="Yu Gothic"/>
                         </a:rPr>
-                        <a:t>② 予算シートを登録し、案件担当を割り当てる</a:t>
+                        <a:t>② 予算シートを登録し、窓口担当を割り当てる</a:t>
                       </a:r>
                     </a:p>
                   </a:txBody>
@@ -9030,7 +9030,7 @@
                 <a:ea typeface="Yu Gothic"/>
                 <a:cs typeface="Yu Gothic"/>
               </a:rPr>
-              <a:t>R＝実行、A＝最終責任（1行に1つ。移管の稟議は部門長同士の合意のため、移管元の責任者と IT部門長の両方が A）、C＝相談、I＝連絡。実務（R）は進行役と案件担当だけが持つ。</a:t>
+              <a:t>R＝実行、A＝最終責任（1行に1つ。移管の稟議は部門長同士の合意のため、移管元の責任者と IT部門長の両方が A）、C＝相談、I＝連絡。実務（R）は事務局と窓口担当だけが持つ。</a:t>
             </a:r>
           </a:p>
           <a:p>
@@ -9268,7 +9268,7 @@
                           <a:ea typeface="Yu Gothic"/>
                           <a:cs typeface="Yu Gothic"/>
                         </a:rPr>
-                        <a:t>進行役</a:t>
+                        <a:t>事務局</a:t>
                       </a:r>
                     </a:p>
                   </a:txBody>
@@ -9312,7 +9312,7 @@
                           <a:ea typeface="Yu Gothic"/>
                           <a:cs typeface="Yu Gothic"/>
                         </a:rPr>
-                        <a:t>案件担当</a:t>
+                        <a:t>窓口担当</a:t>
                       </a:r>
                     </a:p>
                   </a:txBody>
@@ -11904,7 +11904,7 @@
                 <a:ea typeface="Yu Gothic"/>
                 <a:cs typeface="Yu Gothic"/>
               </a:rPr>
-              <a:t>R＝実行、A＝最終責任（1行に1つ。移管の稟議は部門長同士の合意のため、移管元の責任者と IT部門長の両方が A）、C＝相談、I＝連絡。実務（R）は進行役と案件担当だけが持つ。</a:t>
+              <a:t>R＝実行、A＝最終責任（1行に1つ。移管の稟議は部門長同士の合意のため、移管元の責任者と IT部門長の両方が A）、C＝相談、I＝連絡。実務（R）は事務局と窓口担当だけが持つ。</a:t>
             </a:r>
           </a:p>
           <a:p>
@@ -15550,7 +15550,7 @@
                           <a:ea typeface="Yu Gothic"/>
                           <a:cs typeface="Yu Gothic"/>
                         </a:rPr>
-                        <a:t>キックオフの前（受領済み）、ヒアリング（10月）</a:t>
+                        <a:t>活動の開始の前（受領済み）、ヒアリング（10月）</a:t>
                       </a:r>
                     </a:p>
                   </a:txBody>
@@ -15772,7 +15772,7 @@
                           <a:ea typeface="Yu Gothic"/>
                           <a:cs typeface="Yu Gothic"/>
                         </a:rPr>
-                        <a:t>⑦の後（案件担当）</a:t>
+                        <a:t>⑦の後（窓口担当）</a:t>
                       </a:r>
                     </a:p>
                   </a:txBody>
@@ -15994,7 +15994,7 @@
                           <a:ea typeface="Yu Gothic"/>
                           <a:cs typeface="Yu Gothic"/>
                         </a:rPr>
-                        <a:t>⑯の後（進行役）</a:t>
+                        <a:t>⑯の後（事務局）</a:t>
                       </a:r>
                     </a:p>
                   </a:txBody>
@@ -16438,7 +16438,7 @@
                           <a:ea typeface="Yu Gothic"/>
                           <a:cs typeface="Yu Gothic"/>
                         </a:rPr>
-                        <a:t>⑩（案件担当）</a:t>
+                        <a:t>⑩（窓口担当）</a:t>
                       </a:r>
                     </a:p>
                   </a:txBody>
@@ -17136,6 +17136,228 @@
                           <a:ea typeface="Yu Gothic"/>
                           <a:cs typeface="Yu Gothic"/>
                         </a:rPr>
+                        <a:t>1.6</a:t>
+                      </a:r>
+                    </a:p>
+                  </a:txBody>
+                  <a:tcPr marL="54000" marR="54000" marT="28800" marB="28800" anchor="ctr">
+                    <a:lnL w="9525">
+                      <a:solidFill>
+                        <a:srgbClr val="9AA5B5"/>
+                      </a:solidFill>
+                    </a:lnL>
+                    <a:lnR w="9525">
+                      <a:solidFill>
+                        <a:srgbClr val="9AA5B5"/>
+                      </a:solidFill>
+                    </a:lnR>
+                    <a:lnT w="9525">
+                      <a:solidFill>
+                        <a:srgbClr val="9AA5B5"/>
+                      </a:solidFill>
+                    </a:lnT>
+                    <a:lnB w="9525">
+                      <a:solidFill>
+                        <a:srgbClr val="9AA5B5"/>
+                      </a:solidFill>
+                    </a:lnB>
+                    <a:solidFill>
+                      <a:srgbClr val="FFFFFF"/>
+                    </a:solidFill>
+                  </a:tcPr>
+                </a:tc>
+                <a:tc>
+                  <a:txBody>
+                    <a:bodyPr wrap="square"/>
+                    <a:lstStyle/>
+                    <a:p>
+                      <a:r>
+                        <a:rPr sz="1200" b="0">
+                          <a:solidFill>
+                            <a:srgbClr val="222B38"/>
+                          </a:solidFill>
+                          <a:latin typeface="Yu Gothic"/>
+                          <a:ea typeface="Yu Gothic"/>
+                          <a:cs typeface="Yu Gothic"/>
+                        </a:rPr>
+                        <a:t>2026-10-17</a:t>
+                      </a:r>
+                    </a:p>
+                  </a:txBody>
+                  <a:tcPr marL="54000" marR="54000" marT="28800" marB="28800" anchor="ctr">
+                    <a:lnL w="9525">
+                      <a:solidFill>
+                        <a:srgbClr val="9AA5B5"/>
+                      </a:solidFill>
+                    </a:lnL>
+                    <a:lnR w="9525">
+                      <a:solidFill>
+                        <a:srgbClr val="9AA5B5"/>
+                      </a:solidFill>
+                    </a:lnR>
+                    <a:lnT w="9525">
+                      <a:solidFill>
+                        <a:srgbClr val="9AA5B5"/>
+                      </a:solidFill>
+                    </a:lnT>
+                    <a:lnB w="9525">
+                      <a:solidFill>
+                        <a:srgbClr val="9AA5B5"/>
+                      </a:solidFill>
+                    </a:lnB>
+                    <a:solidFill>
+                      <a:srgbClr val="FFFFFF"/>
+                    </a:solidFill>
+                  </a:tcPr>
+                </a:tc>
+                <a:tc>
+                  <a:txBody>
+                    <a:bodyPr wrap="square"/>
+                    <a:lstStyle/>
+                    <a:p>
+                      <a:r>
+                        <a:rPr sz="1200" b="0">
+                          <a:solidFill>
+                            <a:srgbClr val="222B38"/>
+                          </a:solidFill>
+                          <a:latin typeface="Yu Gothic"/>
+                          <a:ea typeface="Yu Gothic"/>
+                          <a:cs typeface="Yu Gothic"/>
+                        </a:rPr>
+                        <a:t>IT予算移管ガイドラインに合わせ、進行役を事務局、案件担当を窓口担当、キックオフを活動の開始（ガイドラインの公開と説明）に改めた</a:t>
+                      </a:r>
+                    </a:p>
+                  </a:txBody>
+                  <a:tcPr marL="54000" marR="54000" marT="28800" marB="28800" anchor="ctr">
+                    <a:lnL w="9525">
+                      <a:solidFill>
+                        <a:srgbClr val="9AA5B5"/>
+                      </a:solidFill>
+                    </a:lnL>
+                    <a:lnR w="9525">
+                      <a:solidFill>
+                        <a:srgbClr val="9AA5B5"/>
+                      </a:solidFill>
+                    </a:lnR>
+                    <a:lnT w="9525">
+                      <a:solidFill>
+                        <a:srgbClr val="9AA5B5"/>
+                      </a:solidFill>
+                    </a:lnT>
+                    <a:lnB w="9525">
+                      <a:solidFill>
+                        <a:srgbClr val="9AA5B5"/>
+                      </a:solidFill>
+                    </a:lnB>
+                    <a:solidFill>
+                      <a:srgbClr val="FFFFFF"/>
+                    </a:solidFill>
+                  </a:tcPr>
+                </a:tc>
+                <a:tc>
+                  <a:txBody>
+                    <a:bodyPr wrap="square"/>
+                    <a:lstStyle/>
+                    <a:p>
+                      <a:r>
+                        <a:rPr sz="1200" b="0">
+                          <a:solidFill>
+                            <a:srgbClr val="222B38"/>
+                          </a:solidFill>
+                          <a:latin typeface="Yu Gothic"/>
+                          <a:ea typeface="Yu Gothic"/>
+                          <a:cs typeface="Yu Gothic"/>
+                        </a:rPr>
+                        <a:t>予算移管事務局</a:t>
+                      </a:r>
+                    </a:p>
+                  </a:txBody>
+                  <a:tcPr marL="54000" marR="54000" marT="28800" marB="28800" anchor="ctr">
+                    <a:lnL w="9525">
+                      <a:solidFill>
+                        <a:srgbClr val="9AA5B5"/>
+                      </a:solidFill>
+                    </a:lnL>
+                    <a:lnR w="9525">
+                      <a:solidFill>
+                        <a:srgbClr val="9AA5B5"/>
+                      </a:solidFill>
+                    </a:lnR>
+                    <a:lnT w="9525">
+                      <a:solidFill>
+                        <a:srgbClr val="9AA5B5"/>
+                      </a:solidFill>
+                    </a:lnT>
+                    <a:lnB w="9525">
+                      <a:solidFill>
+                        <a:srgbClr val="9AA5B5"/>
+                      </a:solidFill>
+                    </a:lnB>
+                    <a:solidFill>
+                      <a:srgbClr val="FFFFFF"/>
+                    </a:solidFill>
+                  </a:tcPr>
+                </a:tc>
+                <a:tc>
+                  <a:txBody>
+                    <a:bodyPr wrap="square"/>
+                    <a:lstStyle/>
+                    <a:p>
+                      <a:r>
+                        <a:rPr sz="1200" b="0">
+                          <a:solidFill>
+                            <a:srgbClr val="222B38"/>
+                          </a:solidFill>
+                          <a:latin typeface="Yu Gothic"/>
+                          <a:ea typeface="Yu Gothic"/>
+                          <a:cs typeface="Yu Gothic"/>
+                        </a:rPr>
+                        <a:t/>
+                      </a:r>
+                    </a:p>
+                  </a:txBody>
+                  <a:tcPr marL="54000" marR="54000" marT="28800" marB="28800" anchor="ctr">
+                    <a:lnL w="9525">
+                      <a:solidFill>
+                        <a:srgbClr val="9AA5B5"/>
+                      </a:solidFill>
+                    </a:lnL>
+                    <a:lnR w="9525">
+                      <a:solidFill>
+                        <a:srgbClr val="9AA5B5"/>
+                      </a:solidFill>
+                    </a:lnR>
+                    <a:lnT w="9525">
+                      <a:solidFill>
+                        <a:srgbClr val="9AA5B5"/>
+                      </a:solidFill>
+                    </a:lnT>
+                    <a:lnB w="9525">
+                      <a:solidFill>
+                        <a:srgbClr val="9AA5B5"/>
+                      </a:solidFill>
+                    </a:lnB>
+                    <a:solidFill>
+                      <a:srgbClr val="FFFFFF"/>
+                    </a:solidFill>
+                  </a:tcPr>
+                </a:tc>
+              </a:tr>
+              <a:tr h="324000">
+                <a:tc>
+                  <a:txBody>
+                    <a:bodyPr wrap="square"/>
+                    <a:lstStyle/>
+                    <a:p>
+                      <a:r>
+                        <a:rPr sz="1200" b="0">
+                          <a:solidFill>
+                            <a:srgbClr val="222B38"/>
+                          </a:solidFill>
+                          <a:latin typeface="Yu Gothic"/>
+                          <a:ea typeface="Yu Gothic"/>
+                          <a:cs typeface="Yu Gothic"/>
+                        </a:rPr>
                         <a:t>1.5</a:t>
                       </a:r>
                     </a:p>
@@ -18853,7 +19075,7 @@
                           <a:ea typeface="Yu Gothic"/>
                           <a:cs typeface="Yu Gothic"/>
                         </a:rPr>
-                        <a:t>1.5</a:t>
+                        <a:t>1.6</a:t>
                       </a:r>
                     </a:p>
                   </a:txBody>
@@ -19123,7 +19345,7 @@
                           <a:ea typeface="Yu Gothic"/>
                           <a:cs typeface="Yu Gothic"/>
                         </a:rPr>
-                        <a:t>2026-10-12</a:t>
+                        <a:t>2026-10-17</a:t>
                       </a:r>
                     </a:p>
                   </a:txBody>
@@ -20120,7 +20342,7 @@
                           <a:ea typeface="Yu Gothic"/>
                           <a:cs typeface="Yu Gothic"/>
                         </a:rPr>
-                        <a:t>実務：予算移管担当（進行役1名、案件担当（複数））　情報の提供：移管対象部門の担当者</a:t>
+                        <a:t>実務：予算移管担当（事務局、窓口担当（各チーム））　情報の提供：移管対象部門の担当者</a:t>
                       </a:r>
                     </a:p>
                     <a:p>
@@ -20401,7 +20623,7 @@
                 <a:ea typeface="Yu Gothic"/>
                 <a:cs typeface="Yu Gothic"/>
               </a:rPr>
-              <a:t>予算移管担当（進行役・案件担当）</a:t>
+              <a:t>事務局と窓口担当</a:t>
             </a:r>
           </a:p>
         </p:txBody>
@@ -20569,7 +20791,7 @@
                 <a:ea typeface="Yu Gothic"/>
                 <a:cs typeface="Yu Gothic"/>
               </a:rPr>
-              <a:t>進行役 §3.2</a:t>
+              <a:t>事務局 §3.2</a:t>
             </a:r>
           </a:p>
         </p:txBody>
@@ -20654,7 +20876,7 @@
                 <a:ea typeface="Yu Gothic"/>
                 <a:cs typeface="Yu Gothic"/>
               </a:rPr>
-              <a:t>案件担当 §3.1</a:t>
+              <a:t>窓口担当 §3.1</a:t>
             </a:r>
           </a:p>
         </p:txBody>
@@ -20739,7 +20961,7 @@
                 <a:ea typeface="Yu Gothic"/>
                 <a:cs typeface="Yu Gothic"/>
               </a:rPr>
-              <a:t>案件担当 §3.2</a:t>
+              <a:t>窓口担当 §3.2</a:t>
             </a:r>
           </a:p>
         </p:txBody>
@@ -20796,7 +21018,7 @@
                 <a:ea typeface="Yu Gothic"/>
                 <a:cs typeface="Yu Gothic"/>
               </a:rPr>
-              <a:t>① キックオフ</a:t>
+              <a:t>① 活動の開始</a:t>
             </a:r>
           </a:p>
           <a:p>
@@ -20824,7 +21046,7 @@
                 <a:ea typeface="Yu Gothic"/>
                 <a:cs typeface="Yu Gothic"/>
               </a:rPr>
-              <a:t>進行役 §3.1</a:t>
+              <a:t>事務局 §3.1</a:t>
             </a:r>
           </a:p>
         </p:txBody>
@@ -20909,7 +21131,7 @@
                 <a:ea typeface="Yu Gothic"/>
                 <a:cs typeface="Yu Gothic"/>
               </a:rPr>
-              <a:t>案件担当 §3.3</a:t>
+              <a:t>窓口担当 §3.3</a:t>
             </a:r>
           </a:p>
         </p:txBody>
@@ -21589,7 +21811,7 @@
                 <a:ea typeface="Yu Gothic"/>
                 <a:cs typeface="Yu Gothic"/>
               </a:rPr>
-              <a:t>丸数字はプロセス一覧の No.、§ は担当の Runbook（進行役編・案件担当編）の節を示す。</a:t>
+              <a:t>丸数字はプロセス一覧の No.、§ は担当の Runbook（事務局編・窓口担当編）の節を示す。</a:t>
             </a:r>
           </a:p>
           <a:p>
@@ -21602,7 +21824,7 @@
                 <a:ea typeface="Yu Gothic"/>
                 <a:cs typeface="Yu Gothic"/>
               </a:rPr>
-              <a:t>②は進行役がヒアリングの前に行う（案件ごとに案件担当を割り当てる）。③④は、キックオフの前の事前の情報整理として案件担当が10月（2026-10-01〜10-31）に行う。①のキックオフ（2026-11-02。IT部門内で案件担当に説明する）の後、⑤で部門の担当者に記入内容を確かめ、判定保留がなければ棚卸し済みにする（11月。移管元の責任者の承認は要さない）。移管対象部門の担当者は情報と資料を提供する（実務は行わない）。</a:t>
+              <a:t>②は事務局がヒアリングの前に行う（案件ごとに窓口担当を割り当てる）。③④は、活動の開始の前の事前の情報整理として窓口担当が10月（2026-10-01〜10-31）に行う。①の活動の開始（2026-11-02。IT部門内で窓口担当に説明する）の後、⑤で部門の担当者に記入内容を確かめ、判定保留がなければ棚卸し済みにする（11月。移管元の責任者の承認は要さない）。移管対象部門の担当者は情報と資料を提供する（実務は行わない）。</a:t>
             </a:r>
           </a:p>
         </p:txBody>
@@ -21840,7 +22062,7 @@
                 <a:ea typeface="Yu Gothic"/>
                 <a:cs typeface="Yu Gothic"/>
               </a:rPr>
-              <a:t>進行役</a:t>
+              <a:t>事務局</a:t>
             </a:r>
           </a:p>
         </p:txBody>
@@ -22008,7 +22230,7 @@
                 <a:ea typeface="Yu Gothic"/>
                 <a:cs typeface="Yu Gothic"/>
               </a:rPr>
-              <a:t>進行役 §3.3</a:t>
+              <a:t>事務局 §3.3</a:t>
             </a:r>
           </a:p>
         </p:txBody>
@@ -22154,7 +22376,7 @@
                 <a:ea typeface="Yu Gothic"/>
                 <a:cs typeface="Yu Gothic"/>
               </a:rPr>
-              <a:t>⑥は、移管の後に間接業務を担うベンダーマネジメント担当（契約）と事務担当（事務手続き）に相談して作り、案件担当編の付録「引継ぎ要領」として置く（IT部門長の承認は要さない）。キックオフの前（2026-10-30）までに確定させる（予算移管の開始条件）。案件担当は、間接業務の引継ぎ（⑩）で使う。</a:t>
+              <a:t>⑥は、移管の後に間接業務を担うベンダーマネジメント担当（契約）と事務担当（事務手続き）に相談して作り、窓口担当編の付録「引継ぎ要領」として置く（IT部門長の承認は要さない）。活動の開始の前（2026-10-30）までに確定させる（予算移管の開始条件）。窓口担当は、間接業務の引継ぎ（⑩）で使う。</a:t>
             </a:r>
           </a:p>
         </p:txBody>
@@ -22464,7 +22686,7 @@
                 <a:ea typeface="Yu Gothic"/>
                 <a:cs typeface="Yu Gothic"/>
               </a:rPr>
-              <a:t>予算移管担当（進行役・案件担当）</a:t>
+              <a:t>事務局と窓口担当</a:t>
             </a:r>
           </a:p>
         </p:txBody>
@@ -22749,7 +22971,7 @@
                 <a:ea typeface="Yu Gothic"/>
                 <a:cs typeface="Yu Gothic"/>
               </a:rPr>
-              <a:t>案件担当 §3.4</a:t>
+              <a:t>窓口担当 §3.4</a:t>
             </a:r>
           </a:p>
         </p:txBody>
@@ -22905,7 +23127,7 @@
                 <a:ea typeface="Yu Gothic"/>
                 <a:cs typeface="Yu Gothic"/>
               </a:rPr>
-              <a:t>案件担当 §3.5</a:t>
+              <a:t>窓口担当 §3.5</a:t>
             </a:r>
           </a:p>
         </p:txBody>
@@ -23335,7 +23557,7 @@
                 <a:ea typeface="Yu Gothic"/>
                 <a:cs typeface="Yu Gothic"/>
               </a:rPr>
-              <a:t>⑦⑧は案件担当が行う。合意文書は、案件ごとにカスタマイズした RACI（IT関連業務（中間層）の扱い）、経過措置と完了予定、引継ぎの方法をまとめたもの。承認済みの文書（SOP・規程・職務分掌など）で担当が定められ、変更に正式な手続き（GxP の変更管理など）が要る業務は、経過措置として手続きが終わるまで今の担当が続ける。予算は経過措置があっても2027-01-01に一括で移す。⑧の後、合意済みの案件は⑫ 移管の稟議に使う。</a:t>
+              <a:t>⑦⑧は窓口担当が行う。合意文書は、案件ごとにカスタマイズした RACI（IT関連業務（中間層）の扱い）、経過措置と完了予定、引継ぎの方法をまとめたもの。承認済みの文書（SOP・規程・職務分掌など）で担当が定められ、変更に正式な手続き（GxP の変更管理など）が要る業務は、経過措置として手続きが終わるまで今の担当が続ける。予算は経過措置があっても2027-01-01に一括で移す。⑧の後、合意済みの案件は⑫ 移管の稟議に使う。</a:t>
             </a:r>
           </a:p>
         </p:txBody>
@@ -23573,7 +23795,7 @@
                 <a:ea typeface="Yu Gothic"/>
                 <a:cs typeface="Yu Gothic"/>
               </a:rPr>
-              <a:t>案件担当</a:t>
+              <a:t>窓口担当</a:t>
             </a:r>
           </a:p>
         </p:txBody>
@@ -23676,7 +23898,7 @@
                 <a:ea typeface="Yu Gothic"/>
                 <a:cs typeface="Yu Gothic"/>
               </a:rPr>
-              <a:t>進行役</a:t>
+              <a:t>事務局</a:t>
             </a:r>
           </a:p>
         </p:txBody>
@@ -24018,7 +24240,7 @@
                 <a:ea typeface="Yu Gothic"/>
                 <a:cs typeface="Yu Gothic"/>
               </a:rPr>
-              <a:t>案件担当 §3.7</a:t>
+              <a:t>窓口担当 §3.7</a:t>
             </a:r>
           </a:p>
         </p:txBody>
@@ -24160,7 +24382,7 @@
                 <a:ea typeface="Yu Gothic"/>
                 <a:cs typeface="Yu Gothic"/>
               </a:rPr>
-              <a:t>案件担当 §3.8</a:t>
+              <a:t>窓口担当 §3.8</a:t>
             </a:r>
           </a:p>
         </p:txBody>
@@ -24327,7 +24549,7 @@
                 <a:ea typeface="Yu Gothic"/>
                 <a:cs typeface="Yu Gothic"/>
               </a:rPr>
-              <a:t>進行役 §3.4</a:t>
+              <a:t>事務局 §3.4</a:t>
             </a:r>
           </a:p>
         </p:txBody>
@@ -25410,7 +25632,7 @@
                 <a:ea typeface="Yu Gothic"/>
                 <a:cs typeface="Yu Gothic"/>
               </a:rPr>
-              <a:t>進行役</a:t>
+              <a:t>事務局</a:t>
             </a:r>
           </a:p>
         </p:txBody>
@@ -25681,7 +25903,7 @@
                 <a:ea typeface="Yu Gothic"/>
                 <a:cs typeface="Yu Gothic"/>
               </a:rPr>
-              <a:t>進行役 §3.6</a:t>
+              <a:t>事務局 §3.6</a:t>
             </a:r>
           </a:p>
         </p:txBody>
@@ -25766,7 +25988,7 @@
                 <a:ea typeface="Yu Gothic"/>
                 <a:cs typeface="Yu Gothic"/>
               </a:rPr>
-              <a:t>進行役 §3.7</a:t>
+              <a:t>事務局 §3.7</a:t>
             </a:r>
           </a:p>
         </p:txBody>
@@ -26090,7 +26312,7 @@
                 <a:ea typeface="Yu Gothic"/>
                 <a:cs typeface="Yu Gothic"/>
               </a:rPr>
-              <a:t>⑮で「確認（自動）」が空でない案件は、案件担当に移管ステータスの見直しを依頼する（案件担当編 §3.10）。⑯は、IT部門長に求められたときと、移管の稟議が承認されたときに行う。経営層への報告は行わない。</a:t>
+              <a:t>⑮で「確認（自動）」が空でない案件は、窓口担当に移管ステータスの見直しを依頼する（窓口担当編 §3.10）。⑯は、IT部門長に求められたときと、移管の稟議が承認されたときに行う。経営層への報告は行わない。</a:t>
             </a:r>
           </a:p>
         </p:txBody>
@@ -26626,7 +26848,7 @@
                           <a:ea typeface="Yu Gothic"/>
                           <a:cs typeface="Yu Gothic"/>
                         </a:rPr>
-                        <a:t>キックオフを開催する（IT部門内）</a:t>
+                        <a:t>ガイドラインを公開し、説明する</a:t>
                       </a:r>
                     </a:p>
                   </a:txBody>
@@ -26714,7 +26936,7 @@
                           <a:ea typeface="Yu Gothic"/>
                           <a:cs typeface="Yu Gothic"/>
                         </a:rPr>
-                        <a:t>案件担当への説明（進め方、12月末のゴール、引継ぎ要領）</a:t>
+                        <a:t>窓口担当への説明（進め方、12月末のゴール、引継ぎ要領）</a:t>
                       </a:r>
                     </a:p>
                   </a:txBody>
@@ -26758,7 +26980,7 @@
                           <a:ea typeface="Yu Gothic"/>
                           <a:cs typeface="Yu Gothic"/>
                         </a:rPr>
-                        <a:t>進行役</a:t>
+                        <a:t>事務局</a:t>
                       </a:r>
                     </a:p>
                   </a:txBody>
@@ -26802,7 +27024,7 @@
                           <a:ea typeface="Yu Gothic"/>
                           <a:cs typeface="Yu Gothic"/>
                         </a:rPr>
-                        <a:t>キックオフの当日</a:t>
+                        <a:t>活動の開始の当日</a:t>
                       </a:r>
                     </a:p>
                   </a:txBody>
@@ -26846,7 +27068,7 @@
                           <a:ea typeface="Yu Gothic"/>
                           <a:cs typeface="Yu Gothic"/>
                         </a:rPr>
-                        <a:t>進行役編 §3.1</a:t>
+                        <a:t>事務局編 §3.1</a:t>
                       </a:r>
                     </a:p>
                   </a:txBody>
@@ -26936,7 +27158,7 @@
                           <a:ea typeface="Yu Gothic"/>
                           <a:cs typeface="Yu Gothic"/>
                         </a:rPr>
-                        <a:t>予算シートを登録し、案件担当を割り当てる</a:t>
+                        <a:t>予算シートを登録し、窓口担当を割り当てる</a:t>
                       </a:r>
                     </a:p>
                   </a:txBody>
@@ -27024,7 +27246,7 @@
                           <a:ea typeface="Yu Gothic"/>
                           <a:cs typeface="Yu Gothic"/>
                         </a:rPr>
-                        <a:t>予算一覧の案件、案件担当</a:t>
+                        <a:t>予算一覧の案件、窓口担当</a:t>
                       </a:r>
                     </a:p>
                   </a:txBody>
@@ -27068,7 +27290,7 @@
                           <a:ea typeface="Yu Gothic"/>
                           <a:cs typeface="Yu Gothic"/>
                         </a:rPr>
-                        <a:t>進行役</a:t>
+                        <a:t>事務局</a:t>
                       </a:r>
                     </a:p>
                   </a:txBody>
@@ -27156,7 +27378,7 @@
                           <a:ea typeface="Yu Gothic"/>
                           <a:cs typeface="Yu Gothic"/>
                         </a:rPr>
-                        <a:t>進行役編 §3.2</a:t>
+                        <a:t>事務局編 §3.2</a:t>
                       </a:r>
                     </a:p>
                   </a:txBody>
@@ -27378,7 +27600,7 @@
                           <a:ea typeface="Yu Gothic"/>
                           <a:cs typeface="Yu Gothic"/>
                         </a:rPr>
-                        <a:t>案件担当</a:t>
+                        <a:t>窓口担当</a:t>
                       </a:r>
                     </a:p>
                   </a:txBody>
@@ -27422,7 +27644,7 @@
                           <a:ea typeface="Yu Gothic"/>
                           <a:cs typeface="Yu Gothic"/>
                         </a:rPr>
-                        <a:t>ヒアリングの終了まで（10/31。キックオフの前）</a:t>
+                        <a:t>ヒアリングの終了まで（10/31。活動の開始の前）</a:t>
                       </a:r>
                     </a:p>
                   </a:txBody>
@@ -27466,7 +27688,7 @@
                           <a:ea typeface="Yu Gothic"/>
                           <a:cs typeface="Yu Gothic"/>
                         </a:rPr>
-                        <a:t>案件担当編 §3.1</a:t>
+                        <a:t>窓口担当編 §3.1</a:t>
                       </a:r>
                     </a:p>
                   </a:txBody>
@@ -27688,7 +27910,7 @@
                           <a:ea typeface="Yu Gothic"/>
                           <a:cs typeface="Yu Gothic"/>
                         </a:rPr>
-                        <a:t>案件担当</a:t>
+                        <a:t>窓口担当</a:t>
                       </a:r>
                     </a:p>
                   </a:txBody>
@@ -27776,7 +27998,7 @@
                           <a:ea typeface="Yu Gothic"/>
                           <a:cs typeface="Yu Gothic"/>
                         </a:rPr>
-                        <a:t>案件担当編 §3.2</a:t>
+                        <a:t>窓口担当編 §3.2</a:t>
                       </a:r>
                     </a:p>
                   </a:txBody>
@@ -27998,7 +28220,7 @@
                           <a:ea typeface="Yu Gothic"/>
                           <a:cs typeface="Yu Gothic"/>
                         </a:rPr>
-                        <a:t>案件担当</a:t>
+                        <a:t>窓口担当</a:t>
                       </a:r>
                     </a:p>
                   </a:txBody>
@@ -28042,7 +28264,7 @@
                           <a:ea typeface="Yu Gothic"/>
                           <a:cs typeface="Yu Gothic"/>
                         </a:rPr>
-                        <a:t>合意の期限に間に合うように（11月）</a:t>
+                        <a:t>合意の目安に間に合うように（11月）</a:t>
                       </a:r>
                     </a:p>
                   </a:txBody>
@@ -28086,7 +28308,7 @@
                           <a:ea typeface="Yu Gothic"/>
                           <a:cs typeface="Yu Gothic"/>
                         </a:rPr>
-                        <a:t>案件担当編 §3.3</a:t>
+                        <a:t>窓口担当編 §3.3</a:t>
                       </a:r>
                     </a:p>
                   </a:txBody>
@@ -28264,7 +28486,7 @@
                           <a:ea typeface="Yu Gothic"/>
                           <a:cs typeface="Yu Gothic"/>
                         </a:rPr>
-                        <a:t>引継ぎ要領（案件担当編 付録）</a:t>
+                        <a:t>引継ぎ要領（窓口担当編 付録）</a:t>
                       </a:r>
                     </a:p>
                   </a:txBody>
@@ -28308,7 +28530,7 @@
                           <a:ea typeface="Yu Gothic"/>
                           <a:cs typeface="Yu Gothic"/>
                         </a:rPr>
-                        <a:t>進行役</a:t>
+                        <a:t>事務局</a:t>
                       </a:r>
                     </a:p>
                   </a:txBody>
@@ -28352,7 +28574,7 @@
                           <a:ea typeface="Yu Gothic"/>
                           <a:cs typeface="Yu Gothic"/>
                         </a:rPr>
-                        <a:t>引継ぎ要領の確定の期限（10/30。キックオフの前）まで</a:t>
+                        <a:t>引継ぎ要領の確定の期限（10/30。活動の開始の前）まで</a:t>
                       </a:r>
                     </a:p>
                   </a:txBody>
@@ -28396,7 +28618,7 @@
                           <a:ea typeface="Yu Gothic"/>
                           <a:cs typeface="Yu Gothic"/>
                         </a:rPr>
-                        <a:t>進行役編 §3.3</a:t>
+                        <a:t>事務局編 §3.3</a:t>
                       </a:r>
                     </a:p>
                   </a:txBody>
@@ -28618,7 +28840,7 @@
                           <a:ea typeface="Yu Gothic"/>
                           <a:cs typeface="Yu Gothic"/>
                         </a:rPr>
-                        <a:t>案件担当</a:t>
+                        <a:t>窓口担当</a:t>
                       </a:r>
                     </a:p>
                   </a:txBody>
@@ -28662,7 +28884,7 @@
                           <a:ea typeface="Yu Gothic"/>
                           <a:cs typeface="Yu Gothic"/>
                         </a:rPr>
-                        <a:t>合意の期限（12/11）まで</a:t>
+                        <a:t>合意の目安（12/11）まで</a:t>
                       </a:r>
                     </a:p>
                   </a:txBody>
@@ -28706,7 +28928,7 @@
                           <a:ea typeface="Yu Gothic"/>
                           <a:cs typeface="Yu Gothic"/>
                         </a:rPr>
-                        <a:t>案件担当編 §3.4</a:t>
+                        <a:t>窓口担当編 §3.4</a:t>
                       </a:r>
                     </a:p>
                   </a:txBody>
@@ -28928,7 +29150,7 @@
                           <a:ea typeface="Yu Gothic"/>
                           <a:cs typeface="Yu Gothic"/>
                         </a:rPr>
-                        <a:t>案件担当</a:t>
+                        <a:t>窓口担当</a:t>
                       </a:r>
                     </a:p>
                   </a:txBody>
@@ -28972,7 +29194,7 @@
                           <a:ea typeface="Yu Gothic"/>
                           <a:cs typeface="Yu Gothic"/>
                         </a:rPr>
-                        <a:t>合意の期限（12/11）まで</a:t>
+                        <a:t>合意の目安（12/11）まで</a:t>
                       </a:r>
                     </a:p>
                   </a:txBody>
@@ -29016,7 +29238,7 @@
                           <a:ea typeface="Yu Gothic"/>
                           <a:cs typeface="Yu Gothic"/>
                         </a:rPr>
-                        <a:t>案件担当編 §3.5</a:t>
+                        <a:t>窓口担当編 §3.5</a:t>
                       </a:r>
                     </a:p>
                   </a:txBody>
